--- a/files/prezentacii/nvp-8-vooruzhennye-sily.pptx
+++ b/files/prezentacii/nvp-8-vooruzhennye-sily.pptx
@@ -119,13 +119,13 @@
   <p:extLst>
     <p:ext uri="{521415D9-36F7-43E2-AB2F-B90AF26B5E84}">
       <p14:sectionLst xmlns:p14="http://schemas.microsoft.com/office/powerpoint/2010/main">
-        <p14:section name="Введение" id="{87771a71-2213-7bdc-8d79-09eab30863c4}">
+        <p14:section name="Введение" id="{8cb29dd1-58eb-eef2-ed36-56d8c6e4a641}">
           <p14:sldIdLst>
             <p14:sldId id="256"/>
             <p14:sldId id="257"/>
           </p14:sldIdLst>
         </p14:section>
-        <p14:section name="Основная часть" id="{29b4a0fd-9d81-9f58-86e1-5e6834b65fc6}">
+        <p14:section name="Основная часть" id="{86553622-d59e-cf67-27a8-9383d405d91c}">
           <p14:sldIdLst>
             <p14:sldId id="258"/>
             <p14:sldId id="259"/>
@@ -138,7 +138,7 @@
             <p14:sldId id="266"/>
           </p14:sldIdLst>
         </p14:section>
-        <p14:section name="Закрепление" id="{7411527a-53e9-09e1-cca0-9dd388f8ec8c}">
+        <p14:section name="Закрепление" id="{b686d519-02bb-53bc-4458-b854b5aad6c3}">
           <p14:sldIdLst>
             <p14:sldId id="267"/>
             <p14:sldId id="268"/>
@@ -812,7 +812,7 @@
           <a:p>
             <a:r>
               <a:rPr lang="en-US" dirty="0"/>
-              <a:t>Ответы: 1 — Президент РФ. 2 — 7 мая. 3 — Сухопутные войска, Воздушно-космические силы, Военно-морской флот. 4 — РВСН и ВДВ. 5 — пять округов: Ленинградский, Московский, Южный, Центральный, Восточный (плюс ОСК «Северный флот»).</a:t>
+              <a:t>Ответы: 1 — Президент РФ. 2 — 7 мая. 3 — Сухопутные войска, Воздушно-космические силы, Военно-морской флот. 4 — РВСН, ВДВ и войска беспилотных систем (ВБС). 5 — пять округов: Ленинградский, Московский, Южный, Центральный, Восточный (плюс ОСК «Северный флот»).</a:t>
             </a:r>
             <a:endParaRPr lang="en-US" dirty="0"/>
           </a:p>
@@ -1164,7 +1164,7 @@
           <a:p>
             <a:r>
               <a:rPr lang="en-US" dirty="0"/>
-              <a:t>Ключевая дата для запоминания — 7 мая 1992 года. Реформа и последние изменения 2024 года показывают, что структура армии меняется.</a:t>
+              <a:t>Ключевая дата для запоминания — 7 мая 1992 года (16 марта 1992 года вышел указ о создании ВС РФ, 7 мая — указ о создании самостоятельных Вооружённых Сил). Реформа, изменения 2024 года и создание в 2025 году войск беспилотных систем показывают, что структура армии меняется.</a:t>
             </a:r>
             <a:endParaRPr lang="en-US" dirty="0"/>
           </a:p>
@@ -1340,7 +1340,7 @@
           <a:p>
             <a:r>
               <a:rPr lang="en-US" dirty="0"/>
-              <a:t>Три вида и два отдельных рода войск — основа для всех следующих слайдов. Предложите ученикам запомнить аббревиатуры: СВ, ВКС, ВМФ, РВСН, ВДВ.</a:t>
+              <a:t>Три вида и три отдельных рода войск — основа для всех следующих слайдов. Предложите ученикам запомнить аббревиатуры: СВ, ВКС, ВМФ, РВСН, ВДВ, ВБС. Новый род войск — войска беспилотных систем — создан в 2025 году. Кроме видов и родов войск, в составе ВС есть тыл Вооружённых Сил, Силы специальных операций и другие формирования; на слайд они не вынесены.</a:t>
             </a:r>
             <a:endParaRPr lang="en-US" dirty="0"/>
           </a:p>
@@ -1604,7 +1604,7 @@
           <a:p>
             <a:r>
               <a:rPr lang="en-US" dirty="0"/>
-              <a:t>РВСН и ВДВ подчиняются напрямую центральному командованию. Можно показать видео-фрагмент, если есть время.</a:t>
+              <a:t>Отдельные рода войск не входят ни в один из трёх видов. РВСН и ВДВ — «классические», войска беспилотных систем — самый новый род войск (2025 год). Расскажите, что до этого операторов беспилотников готовили в других родах войск (артиллерия, разведка, связь), а теперь для них создана отдельная структура: подразделения есть во всех военных округах. Дату профессионального праздника войск беспилотных систем уточните по актуальным сообщениям Минобороны России. Можно показать видео-фрагмент, если есть время.</a:t>
             </a:r>
             <a:endParaRPr lang="en-US" dirty="0"/>
           </a:p>
@@ -4460,7 +4460,7 @@
                   <a:schemeClr val="tx1"/>
                 </a:solidFill>
               </a:rPr>
-              <a:t>Какие два рода войск являются отдельными?</a:t>
+              <a:t>Назовите три отдельных рода войск.</a:t>
             </a:r>
             <a:endParaRPr lang="en-US" sz="1600" dirty="0"/>
           </a:p>
@@ -4806,7 +4806,7 @@
                   <a:schemeClr val="bg1"/>
                 </a:solidFill>
               </a:rPr>
-              <a:t>Три вида, два отдельных рода войск, пять военных округов</a:t>
+              <a:t>Три вида, три отдельных рода войск, пять военных округов</a:t>
             </a:r>
             <a:endParaRPr lang="en-US" sz="1600" dirty="0"/>
           </a:p>
@@ -4941,7 +4941,7 @@
                   <a:schemeClr val="bg2"/>
                 </a:solidFill>
               </a:rPr>
-              <a:t>Нормативная база: Конституция РФ, ст. 59; ФЗ «Об обороне»; ФЗ «О статусе военнослужащих». Сведения актуальны на октябрь 2026 г.</a:t>
+              <a:t>Нормативная база: Конституция РФ, ст. 59; ФЗ «Об обороне»; ФЗ «О статусе военнослужащих». Данные о войсках беспилотных систем — по сообщениям Минобороны России и СМИ. Сведения актуальны на октябрь 2026 г.</a:t>
             </a:r>
             <a:endParaRPr lang="en-US" sz="1200" dirty="0"/>
           </a:p>
@@ -6285,7 +6285,7 @@
                   <a:schemeClr val="accent1"/>
                 </a:solidFill>
               </a:rPr>
-              <a:t>16 марта 1992</a:t>
+              <a:t>7 мая 1992</a:t>
             </a:r>
             <a:endParaRPr lang="en-US" sz="1800" dirty="0"/>
           </a:p>
@@ -6380,7 +6380,7 @@
                   <a:schemeClr val="tx1"/>
                 </a:solidFill>
               </a:rPr>
-              <a:t>Указ Президента РФ о создании Вооружённых Сил Российской Федерации</a:t>
+              <a:t>Указ о создании самостоятельных Вооружённых Сил России. Эту дату отмечают как День создания ВС РФ</a:t>
             </a:r>
             <a:endParaRPr lang="en-US" sz="1400" dirty="0"/>
           </a:p>
@@ -6416,7 +6416,7 @@
                   <a:schemeClr val="accent1"/>
                 </a:solidFill>
               </a:rPr>
-              <a:t>7 мая 1992</a:t>
+              <a:t>2008–2010</a:t>
             </a:r>
             <a:endParaRPr lang="en-US" sz="1800" dirty="0"/>
           </a:p>
@@ -6511,7 +6511,7 @@
                   <a:schemeClr val="tx1"/>
                 </a:solidFill>
               </a:rPr>
-              <a:t>Указ о создании самостоятельных Вооружённых Сил России. Эту дату отмечают как День создания ВС РФ</a:t>
+              <a:t>Военная реформа: новая структура, военные округа укрупнены</a:t>
             </a:r>
             <a:endParaRPr lang="en-US" sz="1400" dirty="0"/>
           </a:p>
@@ -6547,7 +6547,7 @@
                   <a:schemeClr val="accent1"/>
                 </a:solidFill>
               </a:rPr>
-              <a:t>2008–2010</a:t>
+              <a:t>2024</a:t>
             </a:r>
             <a:endParaRPr lang="en-US" sz="1800" dirty="0"/>
           </a:p>
@@ -6642,7 +6642,7 @@
                   <a:schemeClr val="tx1"/>
                 </a:solidFill>
               </a:rPr>
-              <a:t>Военная реформа: новая структура, военные округа укрупнены</a:t>
+              <a:t>Западный военный округ разделён: воссозданы Московский и Ленинградский округа</a:t>
             </a:r>
             <a:endParaRPr lang="en-US" sz="1400" dirty="0"/>
           </a:p>
@@ -6678,7 +6678,7 @@
                   <a:schemeClr val="accent1"/>
                 </a:solidFill>
               </a:rPr>
-              <a:t>2024</a:t>
+              <a:t>2025</a:t>
             </a:r>
             <a:endParaRPr lang="en-US" sz="1800" dirty="0"/>
           </a:p>
@@ -6773,7 +6773,7 @@
                   <a:schemeClr val="tx1"/>
                 </a:solidFill>
               </a:rPr>
-              <a:t>Западный военный округ разделён: воссозданы Московский и Ленинградский округа</a:t>
+              <a:t>Создан новый отдельный род войск — войска беспилотных систем</a:t>
             </a:r>
             <a:endParaRPr lang="en-US" sz="1400" dirty="0"/>
           </a:p>
@@ -7829,7 +7829,7 @@
                   <a:schemeClr val="accent2"/>
                 </a:solidFill>
               </a:rPr>
-              <a:t>Два отдельных рода войск и другие формирования</a:t>
+              <a:t>Три отдельных рода войск</a:t>
             </a:r>
             <a:endParaRPr lang="en-US" sz="1600" dirty="0"/>
           </a:p>
@@ -8199,7 +8199,7 @@
                   <a:schemeClr val="tx2"/>
                 </a:solidFill>
               </a:rPr>
-              <a:t>Другие войска</a:t>
+              <a:t>ВБС</a:t>
             </a:r>
             <a:endParaRPr lang="en-US" sz="1400" dirty="0"/>
           </a:p>
@@ -8213,7 +8213,7 @@
                   <a:schemeClr val="tx1"/>
                 </a:solidFill>
               </a:rPr>
-              <a:t>Тыл, Силы специальных операций и др.</a:t>
+              <a:t>Войска беспилотных систем (с 2025 года)</a:t>
             </a:r>
             <a:endParaRPr lang="en-US" sz="1400" dirty="0"/>
           </a:p>
@@ -9470,11 +9470,11 @@
         <p:spPr>
           <a:xfrm>
             <a:off x="457200" y="1280160"/>
-            <a:ext cx="3931920" cy="3200400"/>
+            <a:ext cx="2590800" cy="3200400"/>
           </a:xfrm>
           <a:prstGeom prst="roundRect">
             <a:avLst>
-              <a:gd name="adj" fmla="val 2857"/>
+              <a:gd name="adj" fmla="val 3529"/>
             </a:avLst>
           </a:prstGeom>
           <a:solidFill>
@@ -9548,7 +9548,7 @@
         <p:spPr>
           <a:xfrm>
             <a:off x="658368" y="2194560"/>
-            <a:ext cx="3529584" cy="548640"/>
+            <a:ext cx="2188464" cy="548640"/>
           </a:xfrm>
           <a:prstGeom prst="rect">
             <a:avLst/>
@@ -9584,7 +9584,7 @@
         <p:spPr>
           <a:xfrm>
             <a:off x="658368" y="2761488"/>
-            <a:ext cx="3529584" cy="1216152"/>
+            <a:ext cx="2188464" cy="1216152"/>
           </a:xfrm>
           <a:prstGeom prst="rect">
             <a:avLst/>
@@ -9600,14 +9600,14 @@
               <a:buNone/>
             </a:pPr>
             <a:r>
-              <a:rPr lang="en-US" sz="1600" dirty="0">
+              <a:rPr lang="en-US" sz="1400" dirty="0">
                 <a:solidFill>
                   <a:schemeClr val="tx1"/>
                 </a:solidFill>
               </a:rPr>
-              <a:t>Основа стратегических ядерных сил России. Обеспечивают ядерное сдерживание.</a:t>
-            </a:r>
-            <a:endParaRPr lang="en-US" sz="1600" dirty="0"/>
+              <a:t>Основа ядерных сил России. Обеспечивают ядерное сдерживание.</a:t>
+            </a:r>
+            <a:endParaRPr lang="en-US" sz="1400" dirty="0"/>
           </a:p>
         </p:txBody>
       </p:sp>
@@ -9620,7 +9620,7 @@
         <p:spPr>
           <a:xfrm>
             <a:off x="658368" y="3977640"/>
-            <a:ext cx="3529584" cy="365760"/>
+            <a:ext cx="2188464" cy="365760"/>
           </a:xfrm>
           <a:prstGeom prst="rect">
             <a:avLst/>
@@ -9655,12 +9655,12 @@
         </p:nvSpPr>
         <p:spPr>
           <a:xfrm>
-            <a:off x="4754880" y="1280160"/>
-            <a:ext cx="3931920" cy="3200400"/>
+            <a:off x="3276600" y="1280160"/>
+            <a:ext cx="2590800" cy="3200400"/>
           </a:xfrm>
           <a:prstGeom prst="roundRect">
             <a:avLst>
-              <a:gd name="adj" fmla="val 2857"/>
+              <a:gd name="adj" fmla="val 3529"/>
             </a:avLst>
           </a:prstGeom>
           <a:solidFill>
@@ -9689,7 +9689,7 @@
         </p:nvSpPr>
         <p:spPr>
           <a:xfrm>
-            <a:off x="4956048" y="1481328"/>
+            <a:off x="3477768" y="1481328"/>
             <a:ext cx="566928" cy="566928"/>
           </a:xfrm>
           <a:prstGeom prst="ellipse">
@@ -9717,7 +9717,7 @@
         </p:blipFill>
         <p:spPr>
           <a:xfrm>
-            <a:off x="5092111" y="1617391"/>
+            <a:off x="3613831" y="1617391"/>
             <a:ext cx="294803" cy="294803"/>
           </a:xfrm>
           <a:prstGeom prst="rect">
@@ -9733,8 +9733,8 @@
         </p:nvSpPr>
         <p:spPr>
           <a:xfrm>
-            <a:off x="4956048" y="2194560"/>
-            <a:ext cx="3529584" cy="548640"/>
+            <a:off x="3477768" y="2194560"/>
+            <a:ext cx="2188464" cy="548640"/>
           </a:xfrm>
           <a:prstGeom prst="rect">
             <a:avLst/>
@@ -9769,8 +9769,8 @@
         </p:nvSpPr>
         <p:spPr>
           <a:xfrm>
-            <a:off x="4956048" y="2761488"/>
-            <a:ext cx="3529584" cy="1216152"/>
+            <a:off x="3477768" y="2761488"/>
+            <a:ext cx="2188464" cy="1216152"/>
           </a:xfrm>
           <a:prstGeom prst="rect">
             <a:avLst/>
@@ -9786,14 +9786,14 @@
               <a:buNone/>
             </a:pPr>
             <a:r>
-              <a:rPr lang="en-US" sz="1600" dirty="0">
+              <a:rPr lang="en-US" sz="1400" dirty="0">
                 <a:solidFill>
                   <a:schemeClr val="tx1"/>
                 </a:solidFill>
               </a:rPr>
-              <a:t>Высокомобильный род войск: десантируется с воздуха и выполняет задачи в тылу противника. Девиз — «Никто, кроме нас!»</a:t>
-            </a:r>
-            <a:endParaRPr lang="en-US" sz="1600" dirty="0"/>
+              <a:t>Десантируются с воздуха и выполняют задачи в тылу противника. Девиз — «Никто, кроме нас!»</a:t>
+            </a:r>
+            <a:endParaRPr lang="en-US" sz="1400" dirty="0"/>
           </a:p>
         </p:txBody>
       </p:sp>
@@ -9805,8 +9805,8 @@
         </p:nvSpPr>
         <p:spPr>
           <a:xfrm>
-            <a:off x="4956048" y="3977640"/>
-            <a:ext cx="3529584" cy="365760"/>
+            <a:off x="3477768" y="3977640"/>
+            <a:ext cx="2188464" cy="365760"/>
           </a:xfrm>
           <a:prstGeom prst="rect">
             <a:avLst/>
@@ -9828,6 +9828,192 @@
                 </a:solidFill>
               </a:rPr>
               <a:t>День ВДВ — 2 августа</a:t>
+            </a:r>
+            <a:endParaRPr lang="en-US" sz="1400" dirty="0"/>
+          </a:p>
+        </p:txBody>
+      </p:sp>
+      <p:sp>
+        <p:nvSpPr>
+          <p:cNvPr id="16" name="Карточка"/>
+          <p:cNvSpPr/>
+          <p:nvPr/>
+        </p:nvSpPr>
+        <p:spPr>
+          <a:xfrm>
+            <a:off x="6096000" y="1280160"/>
+            <a:ext cx="2590800" cy="3200400"/>
+          </a:xfrm>
+          <a:prstGeom prst="roundRect">
+            <a:avLst>
+              <a:gd name="adj" fmla="val 3529"/>
+            </a:avLst>
+          </a:prstGeom>
+          <a:solidFill>
+            <a:schemeClr val="bg2"/>
+          </a:solidFill>
+          <a:ln w="12700">
+            <a:solidFill>
+              <a:srgbClr val="D8E0EA"/>
+            </a:solidFill>
+            <a:prstDash val="solid"/>
+          </a:ln>
+          <a:effectLst>
+            <a:outerShdw sx="100000" sy="100000" kx="0" ky="0" algn="bl" rotWithShape="0" blurRad="63500" dist="25400" dir="5400000">
+              <a:srgbClr val="000000">
+                <a:alpha val="10000"/>
+              </a:srgbClr>
+            </a:outerShdw>
+          </a:effectLst>
+        </p:spPr>
+      </p:sp>
+      <p:sp>
+        <p:nvSpPr>
+          <p:cNvPr id="17" name="Круг иконки"/>
+          <p:cNvSpPr/>
+          <p:nvPr/>
+        </p:nvSpPr>
+        <p:spPr>
+          <a:xfrm>
+            <a:off x="6297168" y="1481328"/>
+            <a:ext cx="566928" cy="566928"/>
+          </a:xfrm>
+          <a:prstGeom prst="ellipse">
+            <a:avLst/>
+          </a:prstGeom>
+          <a:solidFill>
+            <a:schemeClr val="accent2"/>
+          </a:solidFill>
+          <a:ln/>
+        </p:spPr>
+      </p:sp>
+      <p:pic>
+        <p:nvPicPr>
+          <p:cNvPr id="18" name="Иконка" descr="preencoded.png">    </p:cNvPr>
+          <p:cNvPicPr>
+            <a:picLocks noChangeAspect="1"/>
+          </p:cNvPicPr>
+          <p:nvPr/>
+        </p:nvPicPr>
+        <p:blipFill>
+          <a:blip r:embed="rId3"/>
+          <a:stretch>
+            <a:fillRect/>
+          </a:stretch>
+        </p:blipFill>
+        <p:spPr>
+          <a:xfrm>
+            <a:off x="6433231" y="1617391"/>
+            <a:ext cx="294803" cy="294803"/>
+          </a:xfrm>
+          <a:prstGeom prst="rect">
+            <a:avLst/>
+          </a:prstGeom>
+        </p:spPr>
+      </p:pic>
+      <p:sp>
+        <p:nvSpPr>
+          <p:cNvPr id="19" name="Text 13"/>
+          <p:cNvSpPr txBox="1"/>
+          <p:nvPr/>
+        </p:nvSpPr>
+        <p:spPr>
+          <a:xfrm>
+            <a:off x="6297168" y="2194560"/>
+            <a:ext cx="2188464" cy="548640"/>
+          </a:xfrm>
+          <a:prstGeom prst="rect">
+            <a:avLst/>
+          </a:prstGeom>
+          <a:noFill/>
+          <a:ln/>
+        </p:spPr>
+        <p:txBody>
+          <a:bodyPr wrap="square" lIns="0" tIns="0" rIns="0" bIns="0" rtlCol="0" anchor="t"/>
+          <a:lstStyle/>
+          <a:p>
+            <a:pPr indent="0" marL="0">
+              <a:buNone/>
+            </a:pPr>
+            <a:r>
+              <a:rPr lang="en-US" sz="1800" b="1" dirty="0">
+                <a:solidFill>
+                  <a:schemeClr val="tx2"/>
+                </a:solidFill>
+              </a:rPr>
+              <a:t>ВБС</a:t>
+            </a:r>
+            <a:endParaRPr lang="en-US" sz="1800" dirty="0"/>
+          </a:p>
+        </p:txBody>
+      </p:sp>
+      <p:sp>
+        <p:nvSpPr>
+          <p:cNvPr id="20" name="Text 14"/>
+          <p:cNvSpPr txBox="1"/>
+          <p:nvPr/>
+        </p:nvSpPr>
+        <p:spPr>
+          <a:xfrm>
+            <a:off x="6297168" y="2761488"/>
+            <a:ext cx="2188464" cy="1216152"/>
+          </a:xfrm>
+          <a:prstGeom prst="rect">
+            <a:avLst/>
+          </a:prstGeom>
+          <a:noFill/>
+          <a:ln/>
+        </p:spPr>
+        <p:txBody>
+          <a:bodyPr wrap="square" lIns="0" tIns="0" rIns="0" bIns="0" rtlCol="0" anchor="t"/>
+          <a:lstStyle/>
+          <a:p>
+            <a:pPr indent="0" marL="0">
+              <a:buNone/>
+            </a:pPr>
+            <a:r>
+              <a:rPr lang="en-US" sz="1400" dirty="0">
+                <a:solidFill>
+                  <a:schemeClr val="tx1"/>
+                </a:solidFill>
+              </a:rPr>
+              <a:t>Войска беспилотных систем — новый род войск. Применяют беспилотники: разведка и поражение целей.</a:t>
+            </a:r>
+            <a:endParaRPr lang="en-US" sz="1400" dirty="0"/>
+          </a:p>
+        </p:txBody>
+      </p:sp>
+      <p:sp>
+        <p:nvSpPr>
+          <p:cNvPr id="21" name="Text 15"/>
+          <p:cNvSpPr txBox="1"/>
+          <p:nvPr/>
+        </p:nvSpPr>
+        <p:spPr>
+          <a:xfrm>
+            <a:off x="6297168" y="3977640"/>
+            <a:ext cx="2188464" cy="365760"/>
+          </a:xfrm>
+          <a:prstGeom prst="rect">
+            <a:avLst/>
+          </a:prstGeom>
+          <a:noFill/>
+          <a:ln/>
+        </p:spPr>
+        <p:txBody>
+          <a:bodyPr wrap="square" lIns="0" tIns="0" rIns="0" bIns="0" rtlCol="0" anchor="ctr"/>
+          <a:lstStyle/>
+          <a:p>
+            <a:pPr indent="0" marL="0">
+              <a:buNone/>
+            </a:pPr>
+            <a:r>
+              <a:rPr lang="en-US" sz="1400" b="1" dirty="0">
+                <a:solidFill>
+                  <a:schemeClr val="accent2"/>
+                </a:solidFill>
+              </a:rPr>
+              <a:t>Создан в 2025 году</a:t>
             </a:r>
             <a:endParaRPr lang="en-US" sz="1400" dirty="0"/>
           </a:p>
